--- a/Documents/Secure Hash Algorithm (SHA) Overview.pptx
+++ b/Documents/Secure Hash Algorithm (SHA) Overview.pptx
@@ -10611,7 +10611,7 @@
         <p:spPr>
           <a:xfrm>
             <a:off x="1595437" y="2139404"/>
-            <a:ext cx="9001125" cy="1466850"/>
+            <a:ext cx="9001125" cy="1777410"/>
           </a:xfrm>
           <a:prstGeom prst="rect">
             <a:avLst/>
@@ -10640,18 +10640,22 @@
               <a:buNone/>
             </a:pPr>
             <a:r>
-              <a:rPr lang="en-US" sz="5250" b="1" i="0" u="none" strike="noStrike" cap="none">
+              <a:rPr lang="en-US" sz="5250" b="1" i="0" u="none" strike="noStrike" cap="none" dirty="0">
                 <a:solidFill>
                   <a:srgbClr val="F3F0DF"/>
                 </a:solidFill>
-                <a:latin typeface="Merriweather"/>
-                <a:ea typeface="Merriweather"/>
-                <a:cs typeface="Merriweather"/>
+                <a:latin typeface="Calibri" panose="020F0502020204030204" pitchFamily="34" charset="0"/>
+                <a:ea typeface="Calibri" panose="020F0502020204030204" pitchFamily="34" charset="0"/>
+                <a:cs typeface="Calibri" panose="020F0502020204030204" pitchFamily="34" charset="0"/>
                 <a:sym typeface="Merriweather"/>
               </a:rPr>
               <a:t>The Secure Hash Algorithm (SHA)</a:t>
             </a:r>
-            <a:endParaRPr/>
+            <a:endParaRPr dirty="0">
+              <a:latin typeface="Calibri" panose="020F0502020204030204" pitchFamily="34" charset="0"/>
+              <a:ea typeface="Calibri" panose="020F0502020204030204" pitchFamily="34" charset="0"/>
+              <a:cs typeface="Calibri" panose="020F0502020204030204" pitchFamily="34" charset="0"/>
+            </a:endParaRPr>
           </a:p>
         </p:txBody>
       </p:sp>
@@ -10750,18 +10754,22 @@
               <a:buNone/>
             </a:pPr>
             <a:r>
-              <a:rPr lang="en-US" sz="4500" b="1" i="0" u="none" strike="noStrike" cap="none">
+              <a:rPr lang="en-US" sz="4500" b="1" i="0" u="none" strike="noStrike" cap="none" dirty="0">
                 <a:solidFill>
                   <a:srgbClr val="005088"/>
                 </a:solidFill>
-                <a:latin typeface="Merriweather"/>
-                <a:ea typeface="Merriweather"/>
-                <a:cs typeface="Merriweather"/>
+                <a:latin typeface="Calibri" panose="020F0502020204030204" pitchFamily="34" charset="0"/>
+                <a:ea typeface="Calibri" panose="020F0502020204030204" pitchFamily="34" charset="0"/>
+                <a:cs typeface="Calibri" panose="020F0502020204030204" pitchFamily="34" charset="0"/>
                 <a:sym typeface="Merriweather"/>
               </a:rPr>
               <a:t>Part I: History &amp; Evolution</a:t>
             </a:r>
-            <a:endParaRPr/>
+            <a:endParaRPr dirty="0">
+              <a:latin typeface="Calibri" panose="020F0502020204030204" pitchFamily="34" charset="0"/>
+              <a:ea typeface="Calibri" panose="020F0502020204030204" pitchFamily="34" charset="0"/>
+              <a:cs typeface="Calibri" panose="020F0502020204030204" pitchFamily="34" charset="0"/>
+            </a:endParaRPr>
           </a:p>
         </p:txBody>
       </p:sp>
@@ -10822,7 +10830,7 @@
         <p:spPr>
           <a:xfrm>
             <a:off x="2219325" y="3812827"/>
-            <a:ext cx="7753350" cy="365670"/>
+            <a:ext cx="7753350" cy="443198"/>
           </a:xfrm>
           <a:prstGeom prst="rect">
             <a:avLst/>
@@ -10851,18 +10859,22 @@
               <a:buNone/>
             </a:pPr>
             <a:r>
-              <a:rPr lang="en-US" sz="1800" b="0" i="0" u="none" strike="noStrike" cap="none">
+              <a:rPr lang="en-US" sz="1800" b="0" i="0" u="none" strike="noStrike" cap="none" dirty="0">
                 <a:solidFill>
                   <a:srgbClr val="555555"/>
                 </a:solidFill>
-                <a:latin typeface="DM Sans"/>
-                <a:ea typeface="DM Sans"/>
-                <a:cs typeface="DM Sans"/>
+                <a:latin typeface="Calibri" panose="020F0502020204030204" pitchFamily="34" charset="0"/>
+                <a:ea typeface="Calibri" panose="020F0502020204030204" pitchFamily="34" charset="0"/>
+                <a:cs typeface="Calibri" panose="020F0502020204030204" pitchFamily="34" charset="0"/>
                 <a:sym typeface="DM Sans"/>
               </a:rPr>
               <a:t>The transition from fragile cryptographic checksums to robust algorithms.</a:t>
             </a:r>
-            <a:endParaRPr/>
+            <a:endParaRPr dirty="0">
+              <a:latin typeface="Calibri" panose="020F0502020204030204" pitchFamily="34" charset="0"/>
+              <a:ea typeface="Calibri" panose="020F0502020204030204" pitchFamily="34" charset="0"/>
+              <a:cs typeface="Calibri" panose="020F0502020204030204" pitchFamily="34" charset="0"/>
+            </a:endParaRPr>
           </a:p>
         </p:txBody>
       </p:sp>
@@ -10965,14 +10977,18 @@
                 <a:solidFill>
                   <a:srgbClr val="005088"/>
                 </a:solidFill>
-                <a:latin typeface="Merriweather"/>
-                <a:ea typeface="Merriweather"/>
-                <a:cs typeface="Merriweather"/>
+                <a:latin typeface="Calibri" panose="020F0502020204030204" pitchFamily="34" charset="0"/>
+                <a:ea typeface="Calibri" panose="020F0502020204030204" pitchFamily="34" charset="0"/>
+                <a:cs typeface="Calibri" panose="020F0502020204030204" pitchFamily="34" charset="0"/>
                 <a:sym typeface="Merriweather"/>
               </a:rPr>
               <a:t>History</a:t>
             </a:r>
-            <a:endParaRPr dirty="0"/>
+            <a:endParaRPr dirty="0">
+              <a:latin typeface="Calibri" panose="020F0502020204030204" pitchFamily="34" charset="0"/>
+              <a:ea typeface="Calibri" panose="020F0502020204030204" pitchFamily="34" charset="0"/>
+              <a:cs typeface="Calibri" panose="020F0502020204030204" pitchFamily="34" charset="0"/>
+            </a:endParaRPr>
           </a:p>
         </p:txBody>
       </p:sp>
@@ -11033,7 +11049,7 @@
         <p:spPr>
           <a:xfrm>
             <a:off x="2219324" y="1830624"/>
-            <a:ext cx="7753350" cy="3397853"/>
+            <a:ext cx="7753350" cy="2068259"/>
           </a:xfrm>
           <a:prstGeom prst="rect">
             <a:avLst/>
@@ -11063,15 +11079,27 @@
               <a:buChar char="•"/>
             </a:pPr>
             <a:r>
-              <a:rPr lang="en-US" sz="2400" dirty="0"/>
+              <a:rPr lang="en-US" dirty="0">
+                <a:latin typeface="Calibri" panose="020F0502020204030204" pitchFamily="34" charset="0"/>
+                <a:ea typeface="Calibri" panose="020F0502020204030204" pitchFamily="34" charset="0"/>
+                <a:cs typeface="Calibri" panose="020F0502020204030204" pitchFamily="34" charset="0"/>
+              </a:rPr>
               <a:t>The </a:t>
             </a:r>
             <a:r>
-              <a:rPr lang="en-US" sz="2400" b="1" dirty="0"/>
+              <a:rPr lang="en-US" b="1" dirty="0">
+                <a:latin typeface="Calibri" panose="020F0502020204030204" pitchFamily="34" charset="0"/>
+                <a:ea typeface="Calibri" panose="020F0502020204030204" pitchFamily="34" charset="0"/>
+                <a:cs typeface="Calibri" panose="020F0502020204030204" pitchFamily="34" charset="0"/>
+              </a:rPr>
               <a:t>Secure Hash Algorithm (SHA)</a:t>
             </a:r>
             <a:r>
-              <a:rPr lang="en-US" sz="2400" dirty="0"/>
+              <a:rPr lang="en-US" dirty="0">
+                <a:latin typeface="Calibri" panose="020F0502020204030204" pitchFamily="34" charset="0"/>
+                <a:ea typeface="Calibri" panose="020F0502020204030204" pitchFamily="34" charset="0"/>
+                <a:cs typeface="Calibri" panose="020F0502020204030204" pitchFamily="34" charset="0"/>
+              </a:rPr>
               <a:t> is a family of cryptographic hash functions published by the National Institute of Standards and Technology (NIST) as a U.S. Federal Information Processing Standard (FIPS)</a:t>
             </a:r>
           </a:p>
@@ -11090,10 +11118,18 @@
               <a:buChar char="•"/>
             </a:pPr>
             <a:r>
-              <a:rPr lang="en-US" dirty="0"/>
+              <a:rPr lang="en-US" dirty="0">
+                <a:latin typeface="Calibri" panose="020F0502020204030204" pitchFamily="34" charset="0"/>
+                <a:ea typeface="Calibri" panose="020F0502020204030204" pitchFamily="34" charset="0"/>
+                <a:cs typeface="Calibri" panose="020F0502020204030204" pitchFamily="34" charset="0"/>
+              </a:rPr>
               <a:t>At its core, a hash function takes input data of any size—whether it's a single password, an image, or a massive database—and mathematically compresses it into a fixed-size string of characters called a "hash" or "message digest." </a:t>
             </a:r>
-            <a:endParaRPr dirty="0"/>
+            <a:endParaRPr dirty="0">
+              <a:latin typeface="Calibri" panose="020F0502020204030204" pitchFamily="34" charset="0"/>
+              <a:ea typeface="Calibri" panose="020F0502020204030204" pitchFamily="34" charset="0"/>
+              <a:cs typeface="Calibri" panose="020F0502020204030204" pitchFamily="34" charset="0"/>
+            </a:endParaRPr>
           </a:p>
         </p:txBody>
       </p:sp>
@@ -11201,14 +11237,18 @@
                 <a:solidFill>
                   <a:srgbClr val="005088"/>
                 </a:solidFill>
-                <a:latin typeface="Merriweather"/>
-                <a:ea typeface="Merriweather"/>
-                <a:cs typeface="Merriweather"/>
+                <a:latin typeface="Calibri" panose="020F0502020204030204" pitchFamily="34" charset="0"/>
+                <a:ea typeface="Calibri" panose="020F0502020204030204" pitchFamily="34" charset="0"/>
+                <a:cs typeface="Calibri" panose="020F0502020204030204" pitchFamily="34" charset="0"/>
                 <a:sym typeface="Merriweather"/>
               </a:rPr>
               <a:t>Why We Use SHA ?</a:t>
             </a:r>
-            <a:endParaRPr dirty="0"/>
+            <a:endParaRPr dirty="0">
+              <a:latin typeface="Calibri" panose="020F0502020204030204" pitchFamily="34" charset="0"/>
+              <a:ea typeface="Calibri" panose="020F0502020204030204" pitchFamily="34" charset="0"/>
+              <a:cs typeface="Calibri" panose="020F0502020204030204" pitchFamily="34" charset="0"/>
+            </a:endParaRPr>
           </a:p>
         </p:txBody>
       </p:sp>
@@ -11269,7 +11309,7 @@
         <p:spPr>
           <a:xfrm>
             <a:off x="2219324" y="1830624"/>
-            <a:ext cx="7753350" cy="3299365"/>
+            <a:ext cx="7753350" cy="1378839"/>
           </a:xfrm>
           <a:prstGeom prst="rect">
             <a:avLst/>
@@ -11299,7 +11339,11 @@
               <a:buChar char="•"/>
             </a:pPr>
             <a:r>
-              <a:rPr lang="en-US" sz="2400" dirty="0"/>
+              <a:rPr lang="en-US" dirty="0">
+                <a:latin typeface="Calibri" panose="020F0502020204030204" pitchFamily="34" charset="0"/>
+                <a:ea typeface="Calibri" panose="020F0502020204030204" pitchFamily="34" charset="0"/>
+                <a:cs typeface="Calibri" panose="020F0502020204030204" pitchFamily="34" charset="0"/>
+              </a:rPr>
               <a:t>SHA functions are not encryption; you cannot "decrypt" a hash back into the original data. Instead, they act as a unique digital fingerprint for data. To be cryptographically secure, a hash function must possess these traits:</a:t>
             </a:r>
           </a:p>
@@ -11333,10 +11377,16 @@
           <p:cNvGraphicFramePr>
             <a:graphicFrameLocks noGrp="1"/>
           </p:cNvGraphicFramePr>
-          <p:nvPr/>
+          <p:nvPr>
+            <p:extLst>
+              <p:ext uri="{D42A27DB-BD31-4B8C-83A1-F6EECF244321}">
+                <p14:modId xmlns:p14="http://schemas.microsoft.com/office/powerpoint/2010/main" val="170009317"/>
+              </p:ext>
+            </p:extLst>
+          </p:nvPr>
         </p:nvGraphicFramePr>
         <p:xfrm>
-          <a:off x="2219324" y="4781008"/>
+          <a:off x="2219324" y="3137264"/>
           <a:ext cx="8229600" cy="2682240"/>
         </p:xfrm>
         <a:graphic>
@@ -11366,15 +11416,19 @@
                     <a:lstStyle/>
                     <a:p>
                       <a:r>
-                        <a:rPr lang="en-IN" b="1">
+                        <a:rPr lang="en-IN" b="1" dirty="0">
                           <a:effectLst/>
-                          <a:latin typeface="Google Sans Text"/>
+                          <a:latin typeface="Calibri" panose="020F0502020204030204" pitchFamily="34" charset="0"/>
+                          <a:ea typeface="Calibri" panose="020F0502020204030204" pitchFamily="34" charset="0"/>
+                          <a:cs typeface="Calibri" panose="020F0502020204030204" pitchFamily="34" charset="0"/>
                         </a:rPr>
                         <a:t>Property</a:t>
                       </a:r>
-                      <a:endParaRPr lang="en-IN">
+                      <a:endParaRPr lang="en-IN" dirty="0">
                         <a:effectLst/>
-                        <a:latin typeface="Google Sans Text"/>
+                        <a:latin typeface="Calibri" panose="020F0502020204030204" pitchFamily="34" charset="0"/>
+                        <a:ea typeface="Calibri" panose="020F0502020204030204" pitchFamily="34" charset="0"/>
+                        <a:cs typeface="Calibri" panose="020F0502020204030204" pitchFamily="34" charset="0"/>
                       </a:endParaRPr>
                     </a:p>
                   </a:txBody>
@@ -11426,13 +11480,17 @@
                       <a:r>
                         <a:rPr lang="en-IN" b="1">
                           <a:effectLst/>
-                          <a:latin typeface="Google Sans Text"/>
+                          <a:latin typeface="Calibri" panose="020F0502020204030204" pitchFamily="34" charset="0"/>
+                          <a:ea typeface="Calibri" panose="020F0502020204030204" pitchFamily="34" charset="0"/>
+                          <a:cs typeface="Calibri" panose="020F0502020204030204" pitchFamily="34" charset="0"/>
                         </a:rPr>
                         <a:t>Description</a:t>
                       </a:r>
                       <a:endParaRPr lang="en-IN">
                         <a:effectLst/>
-                        <a:latin typeface="Google Sans Text"/>
+                        <a:latin typeface="Calibri" panose="020F0502020204030204" pitchFamily="34" charset="0"/>
+                        <a:ea typeface="Calibri" panose="020F0502020204030204" pitchFamily="34" charset="0"/>
+                        <a:cs typeface="Calibri" panose="020F0502020204030204" pitchFamily="34" charset="0"/>
                       </a:endParaRPr>
                     </a:p>
                   </a:txBody>
@@ -11491,13 +11549,17 @@
                       <a:r>
                         <a:rPr lang="en-IN" b="1">
                           <a:effectLst/>
-                          <a:latin typeface="Google Sans Text"/>
+                          <a:latin typeface="Calibri" panose="020F0502020204030204" pitchFamily="34" charset="0"/>
+                          <a:ea typeface="Calibri" panose="020F0502020204030204" pitchFamily="34" charset="0"/>
+                          <a:cs typeface="Calibri" panose="020F0502020204030204" pitchFamily="34" charset="0"/>
                         </a:rPr>
                         <a:t>Deterministic</a:t>
                       </a:r>
                       <a:endParaRPr lang="en-IN">
                         <a:effectLst/>
-                        <a:latin typeface="Google Sans Text"/>
+                        <a:latin typeface="Calibri" panose="020F0502020204030204" pitchFamily="34" charset="0"/>
+                        <a:ea typeface="Calibri" panose="020F0502020204030204" pitchFamily="34" charset="0"/>
+                        <a:cs typeface="Calibri" panose="020F0502020204030204" pitchFamily="34" charset="0"/>
                       </a:endParaRPr>
                     </a:p>
                   </a:txBody>
@@ -11549,7 +11611,9 @@
                       <a:r>
                         <a:rPr lang="en-US">
                           <a:effectLst/>
-                          <a:latin typeface="Google Sans Text"/>
+                          <a:latin typeface="Calibri" panose="020F0502020204030204" pitchFamily="34" charset="0"/>
+                          <a:ea typeface="Calibri" panose="020F0502020204030204" pitchFamily="34" charset="0"/>
+                          <a:cs typeface="Calibri" panose="020F0502020204030204" pitchFamily="34" charset="0"/>
                         </a:rPr>
                         <a:t>The same exact input will always produce the same exact hash.</a:t>
                       </a:r>
@@ -11608,15 +11672,19 @@
                     <a:lstStyle/>
                     <a:p>
                       <a:r>
-                        <a:rPr lang="en-IN" b="1">
+                        <a:rPr lang="en-IN" b="1" dirty="0">
                           <a:effectLst/>
-                          <a:latin typeface="Google Sans Text"/>
+                          <a:latin typeface="Calibri" panose="020F0502020204030204" pitchFamily="34" charset="0"/>
+                          <a:ea typeface="Calibri" panose="020F0502020204030204" pitchFamily="34" charset="0"/>
+                          <a:cs typeface="Calibri" panose="020F0502020204030204" pitchFamily="34" charset="0"/>
                         </a:rPr>
                         <a:t>One-Way</a:t>
                       </a:r>
-                      <a:endParaRPr lang="en-IN">
+                      <a:endParaRPr lang="en-IN" dirty="0">
                         <a:effectLst/>
-                        <a:latin typeface="Google Sans Text"/>
+                        <a:latin typeface="Calibri" panose="020F0502020204030204" pitchFamily="34" charset="0"/>
+                        <a:ea typeface="Calibri" panose="020F0502020204030204" pitchFamily="34" charset="0"/>
+                        <a:cs typeface="Calibri" panose="020F0502020204030204" pitchFamily="34" charset="0"/>
                       </a:endParaRPr>
                     </a:p>
                   </a:txBody>
@@ -11668,7 +11736,9 @@
                       <a:r>
                         <a:rPr lang="en-US">
                           <a:effectLst/>
-                          <a:latin typeface="Google Sans Text"/>
+                          <a:latin typeface="Calibri" panose="020F0502020204030204" pitchFamily="34" charset="0"/>
+                          <a:ea typeface="Calibri" panose="020F0502020204030204" pitchFamily="34" charset="0"/>
+                          <a:cs typeface="Calibri" panose="020F0502020204030204" pitchFamily="34" charset="0"/>
                         </a:rPr>
                         <a:t>It should be computationally impossible to guess the input from the hash.</a:t>
                       </a:r>
@@ -11729,13 +11799,17 @@
                       <a:r>
                         <a:rPr lang="en-IN" b="1">
                           <a:effectLst/>
-                          <a:latin typeface="Google Sans Text"/>
+                          <a:latin typeface="Calibri" panose="020F0502020204030204" pitchFamily="34" charset="0"/>
+                          <a:ea typeface="Calibri" panose="020F0502020204030204" pitchFamily="34" charset="0"/>
+                          <a:cs typeface="Calibri" panose="020F0502020204030204" pitchFamily="34" charset="0"/>
                         </a:rPr>
                         <a:t>Avalanche Effect</a:t>
                       </a:r>
                       <a:endParaRPr lang="en-IN">
                         <a:effectLst/>
-                        <a:latin typeface="Google Sans Text"/>
+                        <a:latin typeface="Calibri" panose="020F0502020204030204" pitchFamily="34" charset="0"/>
+                        <a:ea typeface="Calibri" panose="020F0502020204030204" pitchFamily="34" charset="0"/>
+                        <a:cs typeface="Calibri" panose="020F0502020204030204" pitchFamily="34" charset="0"/>
                       </a:endParaRPr>
                     </a:p>
                   </a:txBody>
@@ -11787,7 +11861,9 @@
                       <a:r>
                         <a:rPr lang="en-US">
                           <a:effectLst/>
-                          <a:latin typeface="Google Sans Text"/>
+                          <a:latin typeface="Calibri" panose="020F0502020204030204" pitchFamily="34" charset="0"/>
+                          <a:ea typeface="Calibri" panose="020F0502020204030204" pitchFamily="34" charset="0"/>
+                          <a:cs typeface="Calibri" panose="020F0502020204030204" pitchFamily="34" charset="0"/>
                         </a:rPr>
                         <a:t>Changing just one bit of the input changes the resulting hash completely.</a:t>
                       </a:r>
@@ -11848,13 +11924,17 @@
                       <a:r>
                         <a:rPr lang="en-IN" b="1">
                           <a:effectLst/>
-                          <a:latin typeface="Google Sans Text"/>
+                          <a:latin typeface="Calibri" panose="020F0502020204030204" pitchFamily="34" charset="0"/>
+                          <a:ea typeface="Calibri" panose="020F0502020204030204" pitchFamily="34" charset="0"/>
+                          <a:cs typeface="Calibri" panose="020F0502020204030204" pitchFamily="34" charset="0"/>
                         </a:rPr>
                         <a:t>Collision Resistant</a:t>
                       </a:r>
                       <a:endParaRPr lang="en-IN">
                         <a:effectLst/>
-                        <a:latin typeface="Google Sans Text"/>
+                        <a:latin typeface="Calibri" panose="020F0502020204030204" pitchFamily="34" charset="0"/>
+                        <a:ea typeface="Calibri" panose="020F0502020204030204" pitchFamily="34" charset="0"/>
+                        <a:cs typeface="Calibri" panose="020F0502020204030204" pitchFamily="34" charset="0"/>
                       </a:endParaRPr>
                     </a:p>
                   </a:txBody>
@@ -11906,7 +11986,9 @@
                       <a:r>
                         <a:rPr lang="en-US" dirty="0">
                           <a:effectLst/>
-                          <a:latin typeface="Google Sans Text"/>
+                          <a:latin typeface="Calibri" panose="020F0502020204030204" pitchFamily="34" charset="0"/>
+                          <a:ea typeface="Calibri" panose="020F0502020204030204" pitchFamily="34" charset="0"/>
+                          <a:cs typeface="Calibri" panose="020F0502020204030204" pitchFamily="34" charset="0"/>
                         </a:rPr>
                         <a:t>It should be nearly impossible to find two different inputs that produce the same hash.</a:t>
                       </a:r>
@@ -12067,9 +12149,9 @@
               <a:solidFill>
                 <a:schemeClr val="dk1"/>
               </a:solidFill>
-              <a:latin typeface="Calibri"/>
-              <a:ea typeface="Calibri"/>
-              <a:cs typeface="Calibri"/>
+              <a:latin typeface="Calibri" panose="020F0502020204030204" pitchFamily="34" charset="0"/>
+              <a:ea typeface="Calibri" panose="020F0502020204030204" pitchFamily="34" charset="0"/>
+              <a:cs typeface="Calibri" panose="020F0502020204030204" pitchFamily="34" charset="0"/>
               <a:sym typeface="Calibri"/>
             </a:endParaRPr>
           </a:p>
@@ -12114,9 +12196,9 @@
                 <a:solidFill>
                   <a:srgbClr val="005088"/>
                 </a:solidFill>
-                <a:latin typeface="Merriweather"/>
-                <a:ea typeface="Merriweather"/>
-                <a:cs typeface="Merriweather"/>
+                <a:latin typeface="Calibri" panose="020F0502020204030204" pitchFamily="34" charset="0"/>
+                <a:ea typeface="Calibri" panose="020F0502020204030204" pitchFamily="34" charset="0"/>
+                <a:cs typeface="Calibri" panose="020F0502020204030204" pitchFamily="34" charset="0"/>
                 <a:sym typeface="Merriweather"/>
               </a:rPr>
               <a:t>1993: SHA-0</a:t>
@@ -12163,7 +12245,9 @@
                   <a:srgbClr val="34495E"/>
                 </a:solidFill>
                 <a:effectLst/>
-                <a:latin typeface="Inter"/>
+                <a:latin typeface="Calibri" panose="020F0502020204030204" pitchFamily="34" charset="0"/>
+                <a:ea typeface="Calibri" panose="020F0502020204030204" pitchFamily="34" charset="0"/>
+                <a:cs typeface="Calibri" panose="020F0502020204030204" pitchFamily="34" charset="0"/>
               </a:rPr>
               <a:t>Published simply as </a:t>
             </a:r>
@@ -12173,7 +12257,9 @@
                   <a:srgbClr val="03447C"/>
                 </a:solidFill>
                 <a:effectLst/>
-                <a:latin typeface="Inter"/>
+                <a:latin typeface="Calibri" panose="020F0502020204030204" pitchFamily="34" charset="0"/>
+                <a:ea typeface="Calibri" panose="020F0502020204030204" pitchFamily="34" charset="0"/>
+                <a:cs typeface="Calibri" panose="020F0502020204030204" pitchFamily="34" charset="0"/>
               </a:rPr>
               <a:t>SHA</a:t>
             </a:r>
@@ -12183,19 +12269,32 @@
                   <a:srgbClr val="34495E"/>
                 </a:solidFill>
                 <a:effectLst/>
-                <a:latin typeface="Inter"/>
+                <a:latin typeface="Calibri" panose="020F0502020204030204" pitchFamily="34" charset="0"/>
+                <a:ea typeface="Calibri" panose="020F0502020204030204" pitchFamily="34" charset="0"/>
+                <a:cs typeface="Calibri" panose="020F0502020204030204" pitchFamily="34" charset="0"/>
               </a:rPr>
               <a:t>, this 160-bit algorithm was quietly withdrawn by the NSA shortly after publication due to an undisclosed "significant flaw."</a:t>
             </a:r>
             <a:endParaRPr lang="en-US" sz="1600" b="0" dirty="0">
               <a:effectLst/>
+              <a:latin typeface="Calibri" panose="020F0502020204030204" pitchFamily="34" charset="0"/>
+              <a:ea typeface="Calibri" panose="020F0502020204030204" pitchFamily="34" charset="0"/>
+              <a:cs typeface="Calibri" panose="020F0502020204030204" pitchFamily="34" charset="0"/>
             </a:endParaRPr>
           </a:p>
           <a:p>
             <a:br>
-              <a:rPr lang="en-US" sz="1600" dirty="0"/>
+              <a:rPr lang="en-US" sz="1600" dirty="0">
+                <a:latin typeface="Calibri" panose="020F0502020204030204" pitchFamily="34" charset="0"/>
+                <a:ea typeface="Calibri" panose="020F0502020204030204" pitchFamily="34" charset="0"/>
+                <a:cs typeface="Calibri" panose="020F0502020204030204" pitchFamily="34" charset="0"/>
+              </a:rPr>
             </a:br>
-            <a:endParaRPr dirty="0"/>
+            <a:endParaRPr dirty="0">
+              <a:latin typeface="Calibri" panose="020F0502020204030204" pitchFamily="34" charset="0"/>
+              <a:ea typeface="Calibri" panose="020F0502020204030204" pitchFamily="34" charset="0"/>
+              <a:cs typeface="Calibri" panose="020F0502020204030204" pitchFamily="34" charset="0"/>
+            </a:endParaRPr>
           </a:p>
         </p:txBody>
       </p:sp>
@@ -12239,11 +12338,17 @@
                   <a:srgbClr val="03447C"/>
                 </a:solidFill>
                 <a:effectLst/>
-                <a:latin typeface="Merriweather" panose="00000500000000000000" pitchFamily="2" charset="0"/>
+                <a:latin typeface="Calibri" panose="020F0502020204030204" pitchFamily="34" charset="0"/>
+                <a:ea typeface="Calibri" panose="020F0502020204030204" pitchFamily="34" charset="0"/>
+                <a:cs typeface="Calibri" panose="020F0502020204030204" pitchFamily="34" charset="0"/>
               </a:rPr>
               <a:t>1995: SHA-1</a:t>
             </a:r>
-            <a:endParaRPr dirty="0"/>
+            <a:endParaRPr dirty="0">
+              <a:latin typeface="Calibri" panose="020F0502020204030204" pitchFamily="34" charset="0"/>
+              <a:ea typeface="Calibri" panose="020F0502020204030204" pitchFamily="34" charset="0"/>
+              <a:cs typeface="Calibri" panose="020F0502020204030204" pitchFamily="34" charset="0"/>
+            </a:endParaRPr>
           </a:p>
         </p:txBody>
       </p:sp>
@@ -12286,19 +12391,32 @@
                   <a:srgbClr val="34495E"/>
                 </a:solidFill>
                 <a:effectLst/>
-                <a:latin typeface="Inter"/>
+                <a:latin typeface="Calibri" panose="020F0502020204030204" pitchFamily="34" charset="0"/>
+                <a:ea typeface="Calibri" panose="020F0502020204030204" pitchFamily="34" charset="0"/>
+                <a:cs typeface="Calibri" panose="020F0502020204030204" pitchFamily="34" charset="0"/>
               </a:rPr>
               <a:t>Designed to fix the undisclosed flaw of SHA-0, it became a global standard for over a decade. By 2005 theoretical weaknesses emerged, and in 2017 Google demonstrated a real-world collision, rendering it broken.</a:t>
             </a:r>
             <a:endParaRPr lang="en-US" sz="1600" b="0" dirty="0">
               <a:effectLst/>
+              <a:latin typeface="Calibri" panose="020F0502020204030204" pitchFamily="34" charset="0"/>
+              <a:ea typeface="Calibri" panose="020F0502020204030204" pitchFamily="34" charset="0"/>
+              <a:cs typeface="Calibri" panose="020F0502020204030204" pitchFamily="34" charset="0"/>
             </a:endParaRPr>
           </a:p>
           <a:p>
             <a:br>
-              <a:rPr lang="en-US" sz="1600" dirty="0"/>
+              <a:rPr lang="en-US" sz="1600" dirty="0">
+                <a:latin typeface="Calibri" panose="020F0502020204030204" pitchFamily="34" charset="0"/>
+                <a:ea typeface="Calibri" panose="020F0502020204030204" pitchFamily="34" charset="0"/>
+                <a:cs typeface="Calibri" panose="020F0502020204030204" pitchFamily="34" charset="0"/>
+              </a:rPr>
             </a:br>
-            <a:endParaRPr dirty="0"/>
+            <a:endParaRPr dirty="0">
+              <a:latin typeface="Calibri" panose="020F0502020204030204" pitchFamily="34" charset="0"/>
+              <a:ea typeface="Calibri" panose="020F0502020204030204" pitchFamily="34" charset="0"/>
+              <a:cs typeface="Calibri" panose="020F0502020204030204" pitchFamily="34" charset="0"/>
+            </a:endParaRPr>
           </a:p>
         </p:txBody>
       </p:sp>
@@ -12341,19 +12459,32 @@
                   <a:srgbClr val="03447C"/>
                 </a:solidFill>
                 <a:effectLst/>
-                <a:latin typeface="Merriweather" panose="00000500000000000000" pitchFamily="2" charset="0"/>
+                <a:latin typeface="Calibri" panose="020F0502020204030204" pitchFamily="34" charset="0"/>
+                <a:ea typeface="Calibri" panose="020F0502020204030204" pitchFamily="34" charset="0"/>
+                <a:cs typeface="Calibri" panose="020F0502020204030204" pitchFamily="34" charset="0"/>
               </a:rPr>
               <a:t>2001: SHA-2</a:t>
             </a:r>
             <a:endParaRPr lang="en-IN" sz="2400" b="0" dirty="0">
               <a:effectLst/>
+              <a:latin typeface="Calibri" panose="020F0502020204030204" pitchFamily="34" charset="0"/>
+              <a:ea typeface="Calibri" panose="020F0502020204030204" pitchFamily="34" charset="0"/>
+              <a:cs typeface="Calibri" panose="020F0502020204030204" pitchFamily="34" charset="0"/>
             </a:endParaRPr>
           </a:p>
           <a:p>
             <a:br>
-              <a:rPr lang="en-IN" sz="2400" dirty="0"/>
+              <a:rPr lang="en-IN" sz="2400" dirty="0">
+                <a:latin typeface="Calibri" panose="020F0502020204030204" pitchFamily="34" charset="0"/>
+                <a:ea typeface="Calibri" panose="020F0502020204030204" pitchFamily="34" charset="0"/>
+                <a:cs typeface="Calibri" panose="020F0502020204030204" pitchFamily="34" charset="0"/>
+              </a:rPr>
             </a:br>
-            <a:endParaRPr dirty="0"/>
+            <a:endParaRPr dirty="0">
+              <a:latin typeface="Calibri" panose="020F0502020204030204" pitchFamily="34" charset="0"/>
+              <a:ea typeface="Calibri" panose="020F0502020204030204" pitchFamily="34" charset="0"/>
+              <a:cs typeface="Calibri" panose="020F0502020204030204" pitchFamily="34" charset="0"/>
+            </a:endParaRPr>
           </a:p>
         </p:txBody>
       </p:sp>
@@ -12396,7 +12527,9 @@
                   <a:srgbClr val="34495E"/>
                 </a:solidFill>
                 <a:effectLst/>
-                <a:latin typeface="Inter"/>
+                <a:latin typeface="Calibri" panose="020F0502020204030204" pitchFamily="34" charset="0"/>
+                <a:ea typeface="Calibri" panose="020F0502020204030204" pitchFamily="34" charset="0"/>
+                <a:cs typeface="Calibri" panose="020F0502020204030204" pitchFamily="34" charset="0"/>
               </a:rPr>
               <a:t>Introduced </a:t>
             </a:r>
@@ -12406,7 +12539,9 @@
                   <a:srgbClr val="03447C"/>
                 </a:solidFill>
                 <a:effectLst/>
-                <a:latin typeface="Inter"/>
+                <a:latin typeface="Calibri" panose="020F0502020204030204" pitchFamily="34" charset="0"/>
+                <a:ea typeface="Calibri" panose="020F0502020204030204" pitchFamily="34" charset="0"/>
+                <a:cs typeface="Calibri" panose="020F0502020204030204" pitchFamily="34" charset="0"/>
               </a:rPr>
               <a:t>SHA-256</a:t>
             </a:r>
@@ -12416,7 +12551,9 @@
                   <a:srgbClr val="34495E"/>
                 </a:solidFill>
                 <a:effectLst/>
-                <a:latin typeface="Inter"/>
+                <a:latin typeface="Calibri" panose="020F0502020204030204" pitchFamily="34" charset="0"/>
+                <a:ea typeface="Calibri" panose="020F0502020204030204" pitchFamily="34" charset="0"/>
+                <a:cs typeface="Calibri" panose="020F0502020204030204" pitchFamily="34" charset="0"/>
               </a:rPr>
               <a:t> and </a:t>
             </a:r>
@@ -12426,7 +12563,9 @@
                   <a:srgbClr val="03447C"/>
                 </a:solidFill>
                 <a:effectLst/>
-                <a:latin typeface="Inter"/>
+                <a:latin typeface="Calibri" panose="020F0502020204030204" pitchFamily="34" charset="0"/>
+                <a:ea typeface="Calibri" panose="020F0502020204030204" pitchFamily="34" charset="0"/>
+                <a:cs typeface="Calibri" panose="020F0502020204030204" pitchFamily="34" charset="0"/>
               </a:rPr>
               <a:t>SHA-512</a:t>
             </a:r>
@@ -12436,19 +12575,32 @@
                   <a:srgbClr val="34495E"/>
                 </a:solidFill>
                 <a:effectLst/>
-                <a:latin typeface="Inter"/>
+                <a:latin typeface="Calibri" panose="020F0502020204030204" pitchFamily="34" charset="0"/>
+                <a:ea typeface="Calibri" panose="020F0502020204030204" pitchFamily="34" charset="0"/>
+                <a:cs typeface="Calibri" panose="020F0502020204030204" pitchFamily="34" charset="0"/>
               </a:rPr>
               <a:t> with larger bit sizes and a new mathematical structure. Today, it stands as the global gold standard for HTTPS and blockchain architectures.</a:t>
             </a:r>
             <a:endParaRPr lang="en-US" sz="1600" b="0" dirty="0">
               <a:effectLst/>
+              <a:latin typeface="Calibri" panose="020F0502020204030204" pitchFamily="34" charset="0"/>
+              <a:ea typeface="Calibri" panose="020F0502020204030204" pitchFamily="34" charset="0"/>
+              <a:cs typeface="Calibri" panose="020F0502020204030204" pitchFamily="34" charset="0"/>
             </a:endParaRPr>
           </a:p>
           <a:p>
             <a:br>
-              <a:rPr lang="en-US" sz="1600" dirty="0"/>
+              <a:rPr lang="en-US" sz="1600" dirty="0">
+                <a:latin typeface="Calibri" panose="020F0502020204030204" pitchFamily="34" charset="0"/>
+                <a:ea typeface="Calibri" panose="020F0502020204030204" pitchFamily="34" charset="0"/>
+                <a:cs typeface="Calibri" panose="020F0502020204030204" pitchFamily="34" charset="0"/>
+              </a:rPr>
             </a:br>
-            <a:endParaRPr dirty="0"/>
+            <a:endParaRPr dirty="0">
+              <a:latin typeface="Calibri" panose="020F0502020204030204" pitchFamily="34" charset="0"/>
+              <a:ea typeface="Calibri" panose="020F0502020204030204" pitchFamily="34" charset="0"/>
+              <a:cs typeface="Calibri" panose="020F0502020204030204" pitchFamily="34" charset="0"/>
+            </a:endParaRPr>
           </a:p>
         </p:txBody>
       </p:sp>
@@ -12491,19 +12643,32 @@
                   <a:srgbClr val="03447C"/>
                 </a:solidFill>
                 <a:effectLst/>
-                <a:latin typeface="Merriweather" panose="00000500000000000000" pitchFamily="2" charset="0"/>
+                <a:latin typeface="Calibri" panose="020F0502020204030204" pitchFamily="34" charset="0"/>
+                <a:ea typeface="Calibri" panose="020F0502020204030204" pitchFamily="34" charset="0"/>
+                <a:cs typeface="Calibri" panose="020F0502020204030204" pitchFamily="34" charset="0"/>
               </a:rPr>
               <a:t>2012: SHA-3</a:t>
             </a:r>
             <a:endParaRPr lang="en-IN" sz="2400" b="0" dirty="0">
               <a:effectLst/>
+              <a:latin typeface="Calibri" panose="020F0502020204030204" pitchFamily="34" charset="0"/>
+              <a:ea typeface="Calibri" panose="020F0502020204030204" pitchFamily="34" charset="0"/>
+              <a:cs typeface="Calibri" panose="020F0502020204030204" pitchFamily="34" charset="0"/>
             </a:endParaRPr>
           </a:p>
           <a:p>
             <a:br>
-              <a:rPr lang="en-IN" sz="2400" dirty="0"/>
+              <a:rPr lang="en-IN" sz="2400" dirty="0">
+                <a:latin typeface="Calibri" panose="020F0502020204030204" pitchFamily="34" charset="0"/>
+                <a:ea typeface="Calibri" panose="020F0502020204030204" pitchFamily="34" charset="0"/>
+                <a:cs typeface="Calibri" panose="020F0502020204030204" pitchFamily="34" charset="0"/>
+              </a:rPr>
             </a:br>
-            <a:endParaRPr dirty="0"/>
+            <a:endParaRPr dirty="0">
+              <a:latin typeface="Calibri" panose="020F0502020204030204" pitchFamily="34" charset="0"/>
+              <a:ea typeface="Calibri" panose="020F0502020204030204" pitchFamily="34" charset="0"/>
+              <a:cs typeface="Calibri" panose="020F0502020204030204" pitchFamily="34" charset="0"/>
+            </a:endParaRPr>
           </a:p>
         </p:txBody>
       </p:sp>
@@ -12546,7 +12711,9 @@
                   <a:srgbClr val="34495E"/>
                 </a:solidFill>
                 <a:effectLst/>
-                <a:latin typeface="Inter"/>
+                <a:latin typeface="Calibri" panose="020F0502020204030204" pitchFamily="34" charset="0"/>
+                <a:ea typeface="Calibri" panose="020F0502020204030204" pitchFamily="34" charset="0"/>
+                <a:cs typeface="Calibri" panose="020F0502020204030204" pitchFamily="34" charset="0"/>
               </a:rPr>
               <a:t>Selected via a public NIST competition. Based on the </a:t>
             </a:r>
@@ -12556,7 +12723,9 @@
                   <a:srgbClr val="03447C"/>
                 </a:solidFill>
                 <a:effectLst/>
-                <a:latin typeface="Inter"/>
+                <a:latin typeface="Calibri" panose="020F0502020204030204" pitchFamily="34" charset="0"/>
+                <a:ea typeface="Calibri" panose="020F0502020204030204" pitchFamily="34" charset="0"/>
+                <a:cs typeface="Calibri" panose="020F0502020204030204" pitchFamily="34" charset="0"/>
               </a:rPr>
               <a:t>Keccak</a:t>
             </a:r>
@@ -12566,19 +12735,32 @@
                   <a:srgbClr val="34495E"/>
                 </a:solidFill>
                 <a:effectLst/>
-                <a:latin typeface="Inter"/>
+                <a:latin typeface="Calibri" panose="020F0502020204030204" pitchFamily="34" charset="0"/>
+                <a:ea typeface="Calibri" panose="020F0502020204030204" pitchFamily="34" charset="0"/>
+                <a:cs typeface="Calibri" panose="020F0502020204030204" pitchFamily="34" charset="0"/>
               </a:rPr>
               <a:t> "Sponge" architecture, it differs fundamentally from SHA-2 to provide an independent cryptographic backup.</a:t>
             </a:r>
             <a:endParaRPr lang="en-US" b="0" dirty="0">
               <a:effectLst/>
+              <a:latin typeface="Calibri" panose="020F0502020204030204" pitchFamily="34" charset="0"/>
+              <a:ea typeface="Calibri" panose="020F0502020204030204" pitchFamily="34" charset="0"/>
+              <a:cs typeface="Calibri" panose="020F0502020204030204" pitchFamily="34" charset="0"/>
             </a:endParaRPr>
           </a:p>
           <a:p>
             <a:br>
-              <a:rPr lang="en-US" dirty="0"/>
+              <a:rPr lang="en-US" dirty="0">
+                <a:latin typeface="Calibri" panose="020F0502020204030204" pitchFamily="34" charset="0"/>
+                <a:ea typeface="Calibri" panose="020F0502020204030204" pitchFamily="34" charset="0"/>
+                <a:cs typeface="Calibri" panose="020F0502020204030204" pitchFamily="34" charset="0"/>
+              </a:rPr>
             </a:br>
-            <a:endParaRPr dirty="0"/>
+            <a:endParaRPr dirty="0">
+              <a:latin typeface="Calibri" panose="020F0502020204030204" pitchFamily="34" charset="0"/>
+              <a:ea typeface="Calibri" panose="020F0502020204030204" pitchFamily="34" charset="0"/>
+              <a:cs typeface="Calibri" panose="020F0502020204030204" pitchFamily="34" charset="0"/>
+            </a:endParaRPr>
           </a:p>
         </p:txBody>
       </p:sp>
@@ -12621,14 +12803,18 @@
                 <a:solidFill>
                   <a:srgbClr val="005088"/>
                 </a:solidFill>
-                <a:latin typeface="Merriweather"/>
-                <a:ea typeface="Merriweather"/>
-                <a:cs typeface="Merriweather"/>
+                <a:latin typeface="Calibri" panose="020F0502020204030204" pitchFamily="34" charset="0"/>
+                <a:ea typeface="Calibri" panose="020F0502020204030204" pitchFamily="34" charset="0"/>
+                <a:cs typeface="Calibri" panose="020F0502020204030204" pitchFamily="34" charset="0"/>
                 <a:sym typeface="Merriweather"/>
               </a:rPr>
               <a:t>The Evolution of SHA</a:t>
             </a:r>
-            <a:endParaRPr dirty="0"/>
+            <a:endParaRPr dirty="0">
+              <a:latin typeface="Calibri" panose="020F0502020204030204" pitchFamily="34" charset="0"/>
+              <a:ea typeface="Calibri" panose="020F0502020204030204" pitchFamily="34" charset="0"/>
+              <a:cs typeface="Calibri" panose="020F0502020204030204" pitchFamily="34" charset="0"/>
+            </a:endParaRPr>
           </a:p>
         </p:txBody>
       </p:sp>
@@ -12680,9 +12866,9 @@
               <a:solidFill>
                 <a:schemeClr val="dk1"/>
               </a:solidFill>
-              <a:latin typeface="Calibri"/>
-              <a:ea typeface="Calibri"/>
-              <a:cs typeface="Calibri"/>
+              <a:latin typeface="Calibri" panose="020F0502020204030204" pitchFamily="34" charset="0"/>
+              <a:ea typeface="Calibri" panose="020F0502020204030204" pitchFamily="34" charset="0"/>
+              <a:cs typeface="Calibri" panose="020F0502020204030204" pitchFamily="34" charset="0"/>
               <a:sym typeface="Calibri"/>
             </a:endParaRPr>
           </a:p>
@@ -12736,9 +12922,9 @@
               <a:solidFill>
                 <a:schemeClr val="dk1"/>
               </a:solidFill>
-              <a:latin typeface="Calibri"/>
-              <a:ea typeface="Calibri"/>
-              <a:cs typeface="Calibri"/>
+              <a:latin typeface="Calibri" panose="020F0502020204030204" pitchFamily="34" charset="0"/>
+              <a:ea typeface="Calibri" panose="020F0502020204030204" pitchFamily="34" charset="0"/>
+              <a:cs typeface="Calibri" panose="020F0502020204030204" pitchFamily="34" charset="0"/>
               <a:sym typeface="Calibri"/>
             </a:endParaRPr>
           </a:p>
@@ -12792,9 +12978,9 @@
               <a:solidFill>
                 <a:schemeClr val="dk1"/>
               </a:solidFill>
-              <a:latin typeface="Calibri"/>
-              <a:ea typeface="Calibri"/>
-              <a:cs typeface="Calibri"/>
+              <a:latin typeface="Calibri" panose="020F0502020204030204" pitchFamily="34" charset="0"/>
+              <a:ea typeface="Calibri" panose="020F0502020204030204" pitchFamily="34" charset="0"/>
+              <a:cs typeface="Calibri" panose="020F0502020204030204" pitchFamily="34" charset="0"/>
               <a:sym typeface="Calibri"/>
             </a:endParaRPr>
           </a:p>
@@ -12848,9 +13034,9 @@
               <a:solidFill>
                 <a:schemeClr val="dk1"/>
               </a:solidFill>
-              <a:latin typeface="Calibri"/>
-              <a:ea typeface="Calibri"/>
-              <a:cs typeface="Calibri"/>
+              <a:latin typeface="Calibri" panose="020F0502020204030204" pitchFamily="34" charset="0"/>
+              <a:ea typeface="Calibri" panose="020F0502020204030204" pitchFamily="34" charset="0"/>
+              <a:cs typeface="Calibri" panose="020F0502020204030204" pitchFamily="34" charset="0"/>
               <a:sym typeface="Calibri"/>
             </a:endParaRPr>
           </a:p>
@@ -12955,14 +13141,18 @@
                 <a:solidFill>
                   <a:srgbClr val="11CAA0"/>
                 </a:solidFill>
-                <a:latin typeface="Merriweather"/>
-                <a:ea typeface="Merriweather"/>
-                <a:cs typeface="Merriweather"/>
+                <a:latin typeface="Calibri" panose="020F0502020204030204" pitchFamily="34" charset="0"/>
+                <a:ea typeface="Calibri" panose="020F0502020204030204" pitchFamily="34" charset="0"/>
+                <a:cs typeface="Calibri" panose="020F0502020204030204" pitchFamily="34" charset="0"/>
                 <a:sym typeface="Merriweather"/>
               </a:rPr>
               <a:t>Part II: Industrial Applications</a:t>
             </a:r>
-            <a:endParaRPr dirty="0"/>
+            <a:endParaRPr dirty="0">
+              <a:latin typeface="Calibri" panose="020F0502020204030204" pitchFamily="34" charset="0"/>
+              <a:ea typeface="Calibri" panose="020F0502020204030204" pitchFamily="34" charset="0"/>
+              <a:cs typeface="Calibri" panose="020F0502020204030204" pitchFamily="34" charset="0"/>
+            </a:endParaRPr>
           </a:p>
         </p:txBody>
       </p:sp>
@@ -13023,7 +13213,7 @@
         <p:spPr>
           <a:xfrm>
             <a:off x="1685925" y="3812827"/>
-            <a:ext cx="8820150" cy="365670"/>
+            <a:ext cx="8820150" cy="443198"/>
           </a:xfrm>
           <a:prstGeom prst="rect">
             <a:avLst/>
@@ -13052,7 +13242,19 @@
               <a:buNone/>
             </a:pPr>
             <a:r>
-              <a:rPr lang="en-US" sz="1800" b="0" i="0" u="none" strike="noStrike" cap="none">
+              <a:rPr lang="en-US" sz="1800" b="0" i="0" u="none" strike="noStrike" cap="none" dirty="0">
+                <a:solidFill>
+                  <a:srgbClr val="CDD6E2"/>
+                </a:solidFill>
+                <a:latin typeface="Calibri" panose="020F0502020204030204" pitchFamily="34" charset="0"/>
+                <a:ea typeface="Calibri" panose="020F0502020204030204" pitchFamily="34" charset="0"/>
+                <a:cs typeface="Calibri" panose="020F0502020204030204" pitchFamily="34" charset="0"/>
+                <a:sym typeface="DM Sans"/>
+              </a:rPr>
+              <a:t>Where the SHA family powers modern global infrastructure</a:t>
+            </a:r>
+            <a:r>
+              <a:rPr lang="en-US" sz="1800" b="0" i="0" u="none" strike="noStrike" cap="none" dirty="0">
                 <a:solidFill>
                   <a:srgbClr val="CDD6E2"/>
                 </a:solidFill>
@@ -13061,9 +13263,9 @@
                 <a:cs typeface="DM Sans"/>
                 <a:sym typeface="DM Sans"/>
               </a:rPr>
-              <a:t>Where the SHA family powers modern global infrastructure.</a:t>
+              <a:t>.</a:t>
             </a:r>
-            <a:endParaRPr/>
+            <a:endParaRPr dirty="0"/>
           </a:p>
         </p:txBody>
       </p:sp>
@@ -13217,7 +13419,7 @@
         <p:spPr>
           <a:xfrm>
             <a:off x="485775" y="4241452"/>
-            <a:ext cx="3600450" cy="266700"/>
+            <a:ext cx="3600450" cy="253916"/>
           </a:xfrm>
           <a:prstGeom prst="rect">
             <a:avLst/>
@@ -13243,7 +13445,19 @@
               <a:buNone/>
             </a:pPr>
             <a:r>
-              <a:rPr lang="en-US" sz="1650" b="1" i="0" u="none" strike="noStrike" cap="none">
+              <a:rPr lang="en-US" sz="1650" b="1" i="0" u="none" strike="noStrike" cap="none" dirty="0">
+                <a:solidFill>
+                  <a:srgbClr val="005088"/>
+                </a:solidFill>
+                <a:latin typeface="Calibri" panose="020F0502020204030204" pitchFamily="34" charset="0"/>
+                <a:ea typeface="Calibri" panose="020F0502020204030204" pitchFamily="34" charset="0"/>
+                <a:cs typeface="Calibri" panose="020F0502020204030204" pitchFamily="34" charset="0"/>
+                <a:sym typeface="Merriweather"/>
+              </a:rPr>
+              <a:t>Blockchain</a:t>
+            </a:r>
+            <a:r>
+              <a:rPr lang="en-US" sz="1650" b="1" i="0" u="none" strike="noStrike" cap="none" dirty="0">
                 <a:solidFill>
                   <a:srgbClr val="005088"/>
                 </a:solidFill>
@@ -13252,9 +13466,9 @@
                 <a:cs typeface="Merriweather"/>
                 <a:sym typeface="Merriweather"/>
               </a:rPr>
-              <a:t>Blockchain Consensus</a:t>
+              <a:t> Consensus</a:t>
             </a:r>
-            <a:endParaRPr/>
+            <a:endParaRPr dirty="0"/>
           </a:p>
         </p:txBody>
       </p:sp>
@@ -13267,7 +13481,7 @@
         <p:spPr>
           <a:xfrm>
             <a:off x="571500" y="4603402"/>
-            <a:ext cx="3429000" cy="822870"/>
+            <a:ext cx="3429000" cy="997196"/>
           </a:xfrm>
           <a:prstGeom prst="rect">
             <a:avLst/>
@@ -13296,18 +13510,22 @@
               <a:buNone/>
             </a:pPr>
             <a:r>
-              <a:rPr lang="en-US" sz="1350" b="0" i="0" u="none" strike="noStrike" cap="none">
+              <a:rPr lang="en-US" sz="1350" b="0" i="0" u="none" strike="noStrike" cap="none" dirty="0">
                 <a:solidFill>
                   <a:srgbClr val="005088"/>
                 </a:solidFill>
-                <a:latin typeface="DM Sans"/>
-                <a:ea typeface="DM Sans"/>
-                <a:cs typeface="DM Sans"/>
+                <a:latin typeface="Calibri" panose="020F0502020204030204" pitchFamily="34" charset="0"/>
+                <a:ea typeface="Calibri" panose="020F0502020204030204" pitchFamily="34" charset="0"/>
+                <a:cs typeface="Calibri" panose="020F0502020204030204" pitchFamily="34" charset="0"/>
                 <a:sym typeface="DM Sans"/>
               </a:rPr>
               <a:t>Bitcoin uses a "Double SHA-256" pipeline on specialized ASIC hardware for its Proof-of-Work mining.</a:t>
             </a:r>
-            <a:endParaRPr/>
+            <a:endParaRPr dirty="0">
+              <a:latin typeface="Calibri" panose="020F0502020204030204" pitchFamily="34" charset="0"/>
+              <a:ea typeface="Calibri" panose="020F0502020204030204" pitchFamily="34" charset="0"/>
+              <a:cs typeface="Calibri" panose="020F0502020204030204" pitchFamily="34" charset="0"/>
+            </a:endParaRPr>
           </a:p>
         </p:txBody>
       </p:sp>
@@ -13320,7 +13538,7 @@
         <p:spPr>
           <a:xfrm>
             <a:off x="4295775" y="4241452"/>
-            <a:ext cx="3600450" cy="266700"/>
+            <a:ext cx="3600450" cy="253916"/>
           </a:xfrm>
           <a:prstGeom prst="rect">
             <a:avLst/>
@@ -13346,7 +13564,7 @@
               <a:buNone/>
             </a:pPr>
             <a:r>
-              <a:rPr lang="en-US" sz="1650" b="1" i="0" u="none" strike="noStrike" cap="none">
+              <a:rPr lang="en-US" sz="1650" b="1" i="0" u="none" strike="noStrike" cap="none" dirty="0">
                 <a:solidFill>
                   <a:srgbClr val="005088"/>
                 </a:solidFill>
@@ -13355,9 +13573,33 @@
                 <a:cs typeface="Merriweather"/>
                 <a:sym typeface="Merriweather"/>
               </a:rPr>
-              <a:t>Git Version Control</a:t>
+              <a:t>Git </a:t>
             </a:r>
-            <a:endParaRPr/>
+            <a:r>
+              <a:rPr lang="en-US" sz="1650" b="1" i="0" u="none" strike="noStrike" cap="none" dirty="0">
+                <a:solidFill>
+                  <a:srgbClr val="005088"/>
+                </a:solidFill>
+                <a:latin typeface="Calibri" panose="020F0502020204030204" pitchFamily="34" charset="0"/>
+                <a:ea typeface="Calibri" panose="020F0502020204030204" pitchFamily="34" charset="0"/>
+                <a:cs typeface="Calibri" panose="020F0502020204030204" pitchFamily="34" charset="0"/>
+                <a:sym typeface="Merriweather"/>
+              </a:rPr>
+              <a:t>Version</a:t>
+            </a:r>
+            <a:r>
+              <a:rPr lang="en-US" sz="1650" b="1" i="0" u="none" strike="noStrike" cap="none" dirty="0">
+                <a:solidFill>
+                  <a:srgbClr val="005088"/>
+                </a:solidFill>
+                <a:latin typeface="Merriweather"/>
+                <a:ea typeface="Merriweather"/>
+                <a:cs typeface="Merriweather"/>
+                <a:sym typeface="Merriweather"/>
+              </a:rPr>
+              <a:t> Control</a:t>
+            </a:r>
+            <a:endParaRPr dirty="0"/>
           </a:p>
         </p:txBody>
       </p:sp>
@@ -13370,7 +13612,7 @@
         <p:spPr>
           <a:xfrm>
             <a:off x="4381500" y="4603402"/>
-            <a:ext cx="3429000" cy="822870"/>
+            <a:ext cx="3429000" cy="997196"/>
           </a:xfrm>
           <a:prstGeom prst="rect">
             <a:avLst/>
@@ -13399,18 +13641,22 @@
               <a:buNone/>
             </a:pPr>
             <a:r>
-              <a:rPr lang="en-US" sz="1350" b="0" i="0" u="none" strike="noStrike" cap="none">
+              <a:rPr lang="en-US" sz="1350" b="0" i="0" u="none" strike="noStrike" cap="none" dirty="0">
                 <a:solidFill>
                   <a:srgbClr val="005088"/>
                 </a:solidFill>
-                <a:latin typeface="DM Sans"/>
-                <a:ea typeface="DM Sans"/>
-                <a:cs typeface="DM Sans"/>
+                <a:latin typeface="Calibri" panose="020F0502020204030204" pitchFamily="34" charset="0"/>
+                <a:ea typeface="Calibri" panose="020F0502020204030204" pitchFamily="34" charset="0"/>
+                <a:cs typeface="Calibri" panose="020F0502020204030204" pitchFamily="34" charset="0"/>
                 <a:sym typeface="DM Sans"/>
               </a:rPr>
               <a:t>Git uses hashes as globally unique identifiers for commits, currently migrating from SHA-1 to SHA-256.</a:t>
             </a:r>
-            <a:endParaRPr/>
+            <a:endParaRPr dirty="0">
+              <a:latin typeface="Calibri" panose="020F0502020204030204" pitchFamily="34" charset="0"/>
+              <a:ea typeface="Calibri" panose="020F0502020204030204" pitchFamily="34" charset="0"/>
+              <a:cs typeface="Calibri" panose="020F0502020204030204" pitchFamily="34" charset="0"/>
+            </a:endParaRPr>
           </a:p>
         </p:txBody>
       </p:sp>
@@ -13423,7 +13669,7 @@
         <p:spPr>
           <a:xfrm>
             <a:off x="8105775" y="4241452"/>
-            <a:ext cx="3600450" cy="266700"/>
+            <a:ext cx="3600450" cy="253916"/>
           </a:xfrm>
           <a:prstGeom prst="rect">
             <a:avLst/>
@@ -13449,7 +13695,19 @@
               <a:buNone/>
             </a:pPr>
             <a:r>
-              <a:rPr lang="en-US" sz="1650" b="1" i="0" u="none" strike="noStrike" cap="none">
+              <a:rPr lang="en-US" sz="1650" b="1" i="0" u="none" strike="noStrike" cap="none" dirty="0">
+                <a:solidFill>
+                  <a:srgbClr val="005088"/>
+                </a:solidFill>
+                <a:latin typeface="Calibri" panose="020F0502020204030204" pitchFamily="34" charset="0"/>
+                <a:ea typeface="Calibri" panose="020F0502020204030204" pitchFamily="34" charset="0"/>
+                <a:cs typeface="Calibri" panose="020F0502020204030204" pitchFamily="34" charset="0"/>
+                <a:sym typeface="Merriweather"/>
+              </a:rPr>
+              <a:t>Secure</a:t>
+            </a:r>
+            <a:r>
+              <a:rPr lang="en-US" sz="1650" b="1" i="0" u="none" strike="noStrike" cap="none" dirty="0">
                 <a:solidFill>
                   <a:srgbClr val="005088"/>
                 </a:solidFill>
@@ -13458,9 +13716,9 @@
                 <a:cs typeface="Merriweather"/>
                 <a:sym typeface="Merriweather"/>
               </a:rPr>
-              <a:t>Secure Web (TLS 1.3)</a:t>
+              <a:t> Web (TLS 1.3)</a:t>
             </a:r>
-            <a:endParaRPr/>
+            <a:endParaRPr dirty="0"/>
           </a:p>
         </p:txBody>
       </p:sp>
@@ -13473,7 +13731,7 @@
         <p:spPr>
           <a:xfrm>
             <a:off x="8191500" y="4603402"/>
-            <a:ext cx="3429000" cy="822870"/>
+            <a:ext cx="3429000" cy="997196"/>
           </a:xfrm>
           <a:prstGeom prst="rect">
             <a:avLst/>
@@ -13502,18 +13760,22 @@
               <a:buNone/>
             </a:pPr>
             <a:r>
-              <a:rPr lang="en-US" sz="1350" b="0" i="0" u="none" strike="noStrike" cap="none">
+              <a:rPr lang="en-US" sz="1350" b="0" i="0" u="none" strike="noStrike" cap="none" dirty="0">
                 <a:solidFill>
                   <a:srgbClr val="005088"/>
                 </a:solidFill>
-                <a:latin typeface="DM Sans"/>
-                <a:ea typeface="DM Sans"/>
-                <a:cs typeface="DM Sans"/>
+                <a:latin typeface="Calibri" panose="020F0502020204030204" pitchFamily="34" charset="0"/>
+                <a:ea typeface="Calibri" panose="020F0502020204030204" pitchFamily="34" charset="0"/>
+                <a:cs typeface="Calibri" panose="020F0502020204030204" pitchFamily="34" charset="0"/>
                 <a:sym typeface="DM Sans"/>
               </a:rPr>
               <a:t>Modern internet connections hash every byte of the handshake transcript to prevent man-in-the-middle attacks.</a:t>
             </a:r>
-            <a:endParaRPr/>
+            <a:endParaRPr dirty="0">
+              <a:latin typeface="Calibri" panose="020F0502020204030204" pitchFamily="34" charset="0"/>
+              <a:ea typeface="Calibri" panose="020F0502020204030204" pitchFamily="34" charset="0"/>
+              <a:cs typeface="Calibri" panose="020F0502020204030204" pitchFamily="34" charset="0"/>
+            </a:endParaRPr>
           </a:p>
         </p:txBody>
       </p:sp>
@@ -13606,18 +13868,22 @@
               <a:buNone/>
             </a:pPr>
             <a:r>
-              <a:rPr lang="en-US" sz="3000" b="1" i="0" u="none" strike="noStrike" cap="none">
+              <a:rPr lang="en-US" sz="3000" b="1" i="0" u="none" strike="noStrike" cap="none" dirty="0">
                 <a:solidFill>
                   <a:srgbClr val="005088"/>
                 </a:solidFill>
-                <a:latin typeface="Merriweather"/>
-                <a:ea typeface="Merriweather"/>
-                <a:cs typeface="Merriweather"/>
+                <a:latin typeface="Calibri" panose="020F0502020204030204" pitchFamily="34" charset="0"/>
+                <a:ea typeface="Calibri" panose="020F0502020204030204" pitchFamily="34" charset="0"/>
+                <a:cs typeface="Calibri" panose="020F0502020204030204" pitchFamily="34" charset="0"/>
                 <a:sym typeface="Merriweather"/>
               </a:rPr>
               <a:t>Real-World Deployments</a:t>
             </a:r>
-            <a:endParaRPr/>
+            <a:endParaRPr dirty="0">
+              <a:latin typeface="Calibri" panose="020F0502020204030204" pitchFamily="34" charset="0"/>
+              <a:ea typeface="Calibri" panose="020F0502020204030204" pitchFamily="34" charset="0"/>
+              <a:cs typeface="Calibri" panose="020F0502020204030204" pitchFamily="34" charset="0"/>
+            </a:endParaRPr>
           </a:p>
         </p:txBody>
       </p:sp>
